--- a/doc/一个32位RISC-V单周期CPU硬件及其SoC系统的设计与构建.pptx
+++ b/doc/一个32位RISC-V单周期CPU硬件及其SoC系统的设计与构建.pptx
@@ -1698,6 +1698,223 @@
         <p:txBody>
           <a:bodyPr/>
           <a:p>
+            <a:endParaRPr lang="zh-CN" altLang="en-US"/>
+          </a:p>
+        </p:txBody>
+      </p:sp>
+    </p:spTree>
+  </p:cSld>
+  <p:clrMapOvr>
+    <a:masterClrMapping/>
+  </p:clrMapOvr>
+</p:notes>
+</file>
+
+<file path=ppt/notesSlides/notesSlide7.xml><?xml version="1.0" encoding="utf-8"?>
+<p:notes xmlns:a="http://schemas.openxmlformats.org/drawingml/2006/main" xmlns:r="http://schemas.openxmlformats.org/officeDocument/2006/relationships" xmlns:p="http://schemas.openxmlformats.org/presentationml/2006/main">
+  <p:cSld>
+    <p:spTree>
+      <p:nvGrpSpPr>
+        <p:cNvPr id="1" name=""/>
+        <p:cNvGrpSpPr/>
+        <p:nvPr/>
+      </p:nvGrpSpPr>
+      <p:grpSpPr/>
+      <p:sp>
+        <p:nvSpPr>
+          <p:cNvPr id="2" name="幻灯片图像占位符 1"/>
+          <p:cNvSpPr>
+            <a:spLocks noGrp="1"/>
+          </p:cNvSpPr>
+          <p:nvPr>
+            <p:ph type="sldImg"/>
+          </p:nvPr>
+        </p:nvSpPr>
+        <p:spPr/>
+      </p:sp>
+      <p:sp>
+        <p:nvSpPr>
+          <p:cNvPr id="3" name="文本占位符 2"/>
+          <p:cNvSpPr>
+            <a:spLocks noGrp="1"/>
+          </p:cNvSpPr>
+          <p:nvPr>
+            <p:ph type="body" idx="4294967295"/>
+          </p:nvPr>
+        </p:nvSpPr>
+        <p:spPr/>
+        <p:txBody>
+          <a:bodyPr/>
+          <a:p>
+            <a:r>
+              <a:rPr lang="en-US" altLang="zh-CN"/>
+              <a:t>DIV	</a:t>
+            </a:r>
+            <a:r>
+              <a:rPr lang="zh-CN" altLang="en-US"/>
+              <a:t>有符号</a:t>
+            </a:r>
+            <a:r>
+              <a:rPr lang="en-US" altLang="zh-CN"/>
+              <a:t> </a:t>
+            </a:r>
+            <a:r>
+              <a:rPr lang="" altLang="en-US"/>
+              <a:t>÷</a:t>
+            </a:r>
+            <a:r>
+              <a:rPr lang="en-US" altLang="zh-CN"/>
+              <a:t> </a:t>
+            </a:r>
+            <a:r>
+              <a:rPr lang="zh-CN" altLang="en-US"/>
+              <a:t>有符号</a:t>
+            </a:r>
+            <a:r>
+              <a:rPr lang="en-US" altLang="zh-CN"/>
+              <a:t>	</a:t>
+            </a:r>
+            <a:r>
+              <a:rPr lang="zh-CN" altLang="en-US"/>
+              <a:t>商（有符号）</a:t>
+            </a:r>
+            <a:r>
+              <a:rPr lang="en-US" altLang="zh-CN"/>
+              <a:t>	</a:t>
+            </a:r>
+            <a:r>
+              <a:rPr lang="zh-CN" altLang="en-US"/>
+              <a:t>需要处理符号</a:t>
+            </a:r>
+            <a:endParaRPr lang="zh-CN" altLang="en-US"/>
+          </a:p>
+          <a:p>
+            <a:r>
+              <a:rPr lang="en-US" altLang="zh-CN"/>
+              <a:t>DIVU	</a:t>
+            </a:r>
+            <a:r>
+              <a:rPr lang="zh-CN" altLang="en-US"/>
+              <a:t>无符号</a:t>
+            </a:r>
+            <a:r>
+              <a:rPr lang="en-US" altLang="zh-CN"/>
+              <a:t> </a:t>
+            </a:r>
+            <a:r>
+              <a:rPr lang="" altLang="en-US"/>
+              <a:t>÷</a:t>
+            </a:r>
+            <a:r>
+              <a:rPr lang="en-US" altLang="zh-CN"/>
+              <a:t> </a:t>
+            </a:r>
+            <a:r>
+              <a:rPr lang="zh-CN" altLang="en-US"/>
+              <a:t>无符号</a:t>
+            </a:r>
+            <a:r>
+              <a:rPr lang="en-US" altLang="zh-CN"/>
+              <a:t>	</a:t>
+            </a:r>
+            <a:r>
+              <a:rPr lang="zh-CN" altLang="en-US"/>
+              <a:t>商</a:t>
+            </a:r>
+            <a:r>
+              <a:rPr lang="en-US" altLang="zh-CN"/>
+              <a:t>	</a:t>
+            </a:r>
+            <a:r>
+              <a:rPr lang="zh-CN" altLang="en-US"/>
+              <a:t>不需要处理符号</a:t>
+            </a:r>
+            <a:endParaRPr lang="zh-CN" altLang="en-US"/>
+          </a:p>
+          <a:p>
+            <a:r>
+              <a:rPr lang="en-US" altLang="zh-CN"/>
+              <a:t>REM	</a:t>
+            </a:r>
+            <a:r>
+              <a:rPr lang="zh-CN" altLang="en-US"/>
+              <a:t>有符号</a:t>
+            </a:r>
+            <a:r>
+              <a:rPr lang="en-US" altLang="zh-CN"/>
+              <a:t> </a:t>
+            </a:r>
+            <a:r>
+              <a:rPr lang="" altLang="en-US"/>
+              <a:t>÷</a:t>
+            </a:r>
+            <a:r>
+              <a:rPr lang="en-US" altLang="zh-CN"/>
+              <a:t> </a:t>
+            </a:r>
+            <a:r>
+              <a:rPr lang="zh-CN" altLang="en-US"/>
+              <a:t>有符号</a:t>
+            </a:r>
+            <a:r>
+              <a:rPr lang="en-US" altLang="zh-CN"/>
+              <a:t>	</a:t>
+            </a:r>
+            <a:r>
+              <a:rPr lang="zh-CN" altLang="en-US"/>
+              <a:t>余数（有符号）</a:t>
+            </a:r>
+            <a:r>
+              <a:rPr lang="en-US" altLang="zh-CN"/>
+              <a:t>	</a:t>
+            </a:r>
+            <a:r>
+              <a:rPr lang="zh-CN" altLang="en-US"/>
+              <a:t>需要处理符号</a:t>
+            </a:r>
+            <a:endParaRPr lang="zh-CN" altLang="en-US"/>
+          </a:p>
+          <a:p>
+            <a:r>
+              <a:rPr lang="en-US" altLang="zh-CN"/>
+              <a:t>REMU	</a:t>
+            </a:r>
+            <a:r>
+              <a:rPr lang="zh-CN" altLang="en-US"/>
+              <a:t>无符号</a:t>
+            </a:r>
+            <a:r>
+              <a:rPr lang="en-US" altLang="zh-CN"/>
+              <a:t> </a:t>
+            </a:r>
+            <a:r>
+              <a:rPr lang="" altLang="en-US"/>
+              <a:t>÷</a:t>
+            </a:r>
+            <a:r>
+              <a:rPr lang="en-US" altLang="zh-CN"/>
+              <a:t> </a:t>
+            </a:r>
+            <a:r>
+              <a:rPr lang="zh-CN" altLang="en-US"/>
+              <a:t>无符号</a:t>
+            </a:r>
+            <a:r>
+              <a:rPr lang="en-US" altLang="zh-CN"/>
+              <a:t>	</a:t>
+            </a:r>
+            <a:r>
+              <a:rPr lang="zh-CN" altLang="en-US"/>
+              <a:t>余数</a:t>
+            </a:r>
+            <a:r>
+              <a:rPr lang="en-US" altLang="zh-CN"/>
+              <a:t>	</a:t>
+            </a:r>
+            <a:r>
+              <a:rPr lang="zh-CN" altLang="en-US"/>
+              <a:t>不需要处理符号</a:t>
+            </a:r>
             <a:endParaRPr lang="zh-CN" altLang="en-US"/>
           </a:p>
         </p:txBody>
@@ -20547,7 +20764,7 @@
         </p:nvSpPr>
         <p:spPr>
           <a:xfrm>
-            <a:off x="149225" y="254635"/>
+            <a:off x="149225" y="243205"/>
             <a:ext cx="8870315" cy="5299710"/>
           </a:xfrm>
           <a:prstGeom prst="rect">
@@ -24851,6 +25068,56 @@
               <a:ea typeface="宋体" panose="02010600030101010101" pitchFamily="2" charset="-122"/>
             </a:endParaRPr>
           </a:p>
+          <a:p>
+            <a:pPr marL="266700" algn="ctr" defTabSz="266700">
+              <a:lnSpc>
+                <a:spcPct val="150000"/>
+              </a:lnSpc>
+              <a:spcBef>
+                <a:spcPct val="0"/>
+              </a:spcBef>
+              <a:spcAft>
+                <a:spcPct val="0"/>
+              </a:spcAft>
+            </a:pPr>
+            <a:r>
+              <a:rPr lang="en-US" altLang="zh-CN" sz="4800">
+                <a:solidFill>
+                  <a:schemeClr val="tx1"/>
+                </a:solidFill>
+                <a:latin typeface="宋体" panose="02010600030101010101" pitchFamily="2" charset="-122"/>
+                <a:ea typeface="宋体" panose="02010600030101010101" pitchFamily="2" charset="-122"/>
+              </a:rPr>
+              <a:t>R</a:t>
+            </a:r>
+            <a:r>
+              <a:rPr lang="zh-CN" altLang="en-US" sz="4800">
+                <a:solidFill>
+                  <a:schemeClr val="tx1"/>
+                </a:solidFill>
+                <a:latin typeface="宋体" panose="02010600030101010101" pitchFamily="2" charset="-122"/>
+                <a:ea typeface="宋体" panose="02010600030101010101" pitchFamily="2" charset="-122"/>
+              </a:rPr>
+              <a:t>型</a:t>
+            </a:r>
+            <a:r>
+              <a:rPr lang="zh-CN" altLang="en-US" sz="4800">
+                <a:solidFill>
+                  <a:schemeClr val="tx1"/>
+                </a:solidFill>
+                <a:latin typeface="宋体" panose="02010600030101010101" pitchFamily="2" charset="-122"/>
+                <a:ea typeface="宋体" panose="02010600030101010101" pitchFamily="2" charset="-122"/>
+              </a:rPr>
+              <a:t>指令</a:t>
+            </a:r>
+            <a:endParaRPr lang="zh-CN" altLang="en-US" sz="4800">
+              <a:solidFill>
+                <a:schemeClr val="tx1"/>
+              </a:solidFill>
+              <a:latin typeface="宋体" panose="02010600030101010101" pitchFamily="2" charset="-122"/>
+              <a:ea typeface="宋体" panose="02010600030101010101" pitchFamily="2" charset="-122"/>
+            </a:endParaRPr>
+          </a:p>
         </p:txBody>
       </p:sp>
     </p:spTree>
@@ -25227,7 +25494,77 @@
                 <a:latin typeface="宋体" panose="02010600030101010101" pitchFamily="2" charset="-122"/>
                 <a:ea typeface="宋体" panose="02010600030101010101" pitchFamily="2" charset="-122"/>
               </a:rPr>
-              <a:t>相乘，结果的高</a:t>
+              <a:t>相乘，</a:t>
+            </a:r>
+            <a:r>
+              <a:rPr lang="zh-CN" altLang="en-US" sz="2000">
+                <a:solidFill>
+                  <a:schemeClr val="tx1"/>
+                </a:solidFill>
+                <a:latin typeface="宋体" panose="02010600030101010101" pitchFamily="2" charset="-122"/>
+                <a:sym typeface="+mn-ea"/>
+              </a:rPr>
+              <a:t>其中</a:t>
+            </a:r>
+            <a:r>
+              <a:rPr lang="en-US" altLang="zh-CN" sz="2000">
+                <a:solidFill>
+                  <a:schemeClr val="tx1"/>
+                </a:solidFill>
+                <a:latin typeface="宋体" panose="02010600030101010101" pitchFamily="2" charset="-122"/>
+                <a:sym typeface="+mn-ea"/>
+              </a:rPr>
+              <a:t>rs1</a:t>
+            </a:r>
+            <a:r>
+              <a:rPr lang="zh-CN" altLang="en-US" sz="2000">
+                <a:solidFill>
+                  <a:schemeClr val="tx1"/>
+                </a:solidFill>
+                <a:latin typeface="宋体" panose="02010600030101010101" pitchFamily="2" charset="-122"/>
+                <a:sym typeface="+mn-ea"/>
+              </a:rPr>
+              <a:t>、</a:t>
+            </a:r>
+            <a:r>
+              <a:rPr lang="en-US" altLang="zh-CN" sz="2000">
+                <a:solidFill>
+                  <a:schemeClr val="tx1"/>
+                </a:solidFill>
+                <a:latin typeface="宋体" panose="02010600030101010101" pitchFamily="2" charset="-122"/>
+                <a:sym typeface="+mn-ea"/>
+              </a:rPr>
+              <a:t>rs2</a:t>
+            </a:r>
+            <a:r>
+              <a:rPr lang="zh-CN" altLang="en-US" sz="2000">
+                <a:solidFill>
+                  <a:schemeClr val="tx1"/>
+                </a:solidFill>
+                <a:latin typeface="宋体" panose="02010600030101010101" pitchFamily="2" charset="-122"/>
+                <a:sym typeface="+mn-ea"/>
+              </a:rPr>
+              <a:t>均为</a:t>
+            </a:r>
+            <a:r>
+              <a:rPr lang="zh-CN" altLang="en-US" sz="2000">
+                <a:solidFill>
+                  <a:schemeClr val="tx1"/>
+                </a:solidFill>
+                <a:latin typeface="宋体" panose="02010600030101010101" pitchFamily="2" charset="-122"/>
+                <a:sym typeface="+mn-ea"/>
+              </a:rPr>
+              <a:t>有符号数，</a:t>
+            </a:r>
+            <a:r>
+              <a:rPr lang="zh-CN" altLang="en-US" sz="2000">
+                <a:solidFill>
+                  <a:schemeClr val="tx1"/>
+                </a:solidFill>
+                <a:latin typeface="宋体" panose="02010600030101010101" pitchFamily="2" charset="-122"/>
+                <a:ea typeface="宋体" panose="02010600030101010101" pitchFamily="2" charset="-122"/>
+              </a:rPr>
+              <a:t>结果的高</a:t>
             </a:r>
             <a:r>
               <a:rPr lang="en-US" altLang="zh-CN" sz="2000">
@@ -27170,13 +27507,29 @@
                 <a:latin typeface="宋体" panose="02010600030101010101" pitchFamily="2" charset="-122"/>
                 <a:ea typeface="宋体" panose="02010600030101010101" pitchFamily="2" charset="-122"/>
               </a:rPr>
-              <a:t>相除，其中</a:t>
+              <a:t>相除，</a:t>
+            </a:r>
+            <a:r>
+              <a:rPr lang="zh-CN" altLang="en-US" sz="2000">
+                <a:solidFill>
+                  <a:schemeClr val="tx1"/>
+                </a:solidFill>
+                <a:highlight>
+                  <a:srgbClr val="FFFF00"/>
+                </a:highlight>
+                <a:latin typeface="宋体" panose="02010600030101010101" pitchFamily="2" charset="-122"/>
+                <a:ea typeface="宋体" panose="02010600030101010101" pitchFamily="2" charset="-122"/>
+              </a:rPr>
+              <a:t>其中</a:t>
             </a:r>
             <a:r>
               <a:rPr lang="en-US" altLang="zh-CN" sz="2000">
                 <a:solidFill>
                   <a:schemeClr val="tx1"/>
                 </a:solidFill>
+                <a:highlight>
+                  <a:srgbClr val="FFFF00"/>
+                </a:highlight>
                 <a:latin typeface="宋体" panose="02010600030101010101" pitchFamily="2" charset="-122"/>
                 <a:ea typeface="宋体" panose="02010600030101010101" pitchFamily="2" charset="-122"/>
               </a:rPr>
@@ -27187,6 +27540,9 @@
                 <a:solidFill>
                   <a:schemeClr val="tx1"/>
                 </a:solidFill>
+                <a:highlight>
+                  <a:srgbClr val="FFFF00"/>
+                </a:highlight>
                 <a:latin typeface="宋体" panose="02010600030101010101" pitchFamily="2" charset="-122"/>
                 <a:ea typeface="宋体" panose="02010600030101010101" pitchFamily="2" charset="-122"/>
               </a:rPr>
@@ -27197,6 +27553,9 @@
                 <a:solidFill>
                   <a:schemeClr val="tx1"/>
                 </a:solidFill>
+                <a:highlight>
+                  <a:srgbClr val="FFFF00"/>
+                </a:highlight>
                 <a:latin typeface="宋体" panose="02010600030101010101" pitchFamily="2" charset="-122"/>
                 <a:ea typeface="宋体" panose="02010600030101010101" pitchFamily="2" charset="-122"/>
               </a:rPr>
@@ -27207,10 +27566,23 @@
                 <a:solidFill>
                   <a:schemeClr val="tx1"/>
                 </a:solidFill>
-                <a:latin typeface="宋体" panose="02010600030101010101" pitchFamily="2" charset="-122"/>
-                <a:ea typeface="宋体" panose="02010600030101010101" pitchFamily="2" charset="-122"/>
-              </a:rPr>
-              <a:t>均为无符号数，结果的商写入</a:t>
+                <a:highlight>
+                  <a:srgbClr val="FFFF00"/>
+                </a:highlight>
+                <a:latin typeface="宋体" panose="02010600030101010101" pitchFamily="2" charset="-122"/>
+                <a:ea typeface="宋体" panose="02010600030101010101" pitchFamily="2" charset="-122"/>
+              </a:rPr>
+              <a:t>均为无符号数</a:t>
+            </a:r>
+            <a:r>
+              <a:rPr lang="zh-CN" altLang="en-US" sz="2000">
+                <a:solidFill>
+                  <a:schemeClr val="tx1"/>
+                </a:solidFill>
+                <a:latin typeface="宋体" panose="02010600030101010101" pitchFamily="2" charset="-122"/>
+                <a:ea typeface="宋体" panose="02010600030101010101" pitchFamily="2" charset="-122"/>
+              </a:rPr>
+              <a:t>，结果的商写入</a:t>
             </a:r>
             <a:r>
               <a:rPr lang="en-US" altLang="zh-CN" sz="2000">
@@ -27490,13 +27862,29 @@
                 <a:latin typeface="宋体" panose="02010600030101010101" pitchFamily="2" charset="-122"/>
                 <a:ea typeface="宋体" panose="02010600030101010101" pitchFamily="2" charset="-122"/>
               </a:rPr>
-              <a:t>相除，其中</a:t>
+              <a:t>相除，其</a:t>
+            </a:r>
+            <a:r>
+              <a:rPr lang="zh-CN" altLang="en-US" sz="2000">
+                <a:solidFill>
+                  <a:schemeClr val="tx1"/>
+                </a:solidFill>
+                <a:highlight>
+                  <a:srgbClr val="FFFF00"/>
+                </a:highlight>
+                <a:latin typeface="宋体" panose="02010600030101010101" pitchFamily="2" charset="-122"/>
+                <a:ea typeface="宋体" panose="02010600030101010101" pitchFamily="2" charset="-122"/>
+              </a:rPr>
+              <a:t>中</a:t>
             </a:r>
             <a:r>
               <a:rPr lang="en-US" altLang="zh-CN" sz="2000">
                 <a:solidFill>
                   <a:schemeClr val="tx1"/>
                 </a:solidFill>
+                <a:highlight>
+                  <a:srgbClr val="FFFF00"/>
+                </a:highlight>
                 <a:latin typeface="宋体" panose="02010600030101010101" pitchFamily="2" charset="-122"/>
                 <a:ea typeface="宋体" panose="02010600030101010101" pitchFamily="2" charset="-122"/>
               </a:rPr>
@@ -27507,6 +27895,9 @@
                 <a:solidFill>
                   <a:schemeClr val="tx1"/>
                 </a:solidFill>
+                <a:highlight>
+                  <a:srgbClr val="FFFF00"/>
+                </a:highlight>
                 <a:latin typeface="宋体" panose="02010600030101010101" pitchFamily="2" charset="-122"/>
                 <a:ea typeface="宋体" panose="02010600030101010101" pitchFamily="2" charset="-122"/>
               </a:rPr>
@@ -27517,6 +27908,9 @@
                 <a:solidFill>
                   <a:schemeClr val="tx1"/>
                 </a:solidFill>
+                <a:highlight>
+                  <a:srgbClr val="FFFF00"/>
+                </a:highlight>
                 <a:latin typeface="宋体" panose="02010600030101010101" pitchFamily="2" charset="-122"/>
                 <a:ea typeface="宋体" panose="02010600030101010101" pitchFamily="2" charset="-122"/>
               </a:rPr>
@@ -27527,10 +27921,23 @@
                 <a:solidFill>
                   <a:schemeClr val="tx1"/>
                 </a:solidFill>
-                <a:latin typeface="宋体" panose="02010600030101010101" pitchFamily="2" charset="-122"/>
-                <a:ea typeface="宋体" panose="02010600030101010101" pitchFamily="2" charset="-122"/>
-              </a:rPr>
-              <a:t>均为无符号数，结果的余数写入</a:t>
+                <a:highlight>
+                  <a:srgbClr val="FFFF00"/>
+                </a:highlight>
+                <a:latin typeface="宋体" panose="02010600030101010101" pitchFamily="2" charset="-122"/>
+                <a:ea typeface="宋体" panose="02010600030101010101" pitchFamily="2" charset="-122"/>
+              </a:rPr>
+              <a:t>均为无符号数</a:t>
+            </a:r>
+            <a:r>
+              <a:rPr lang="zh-CN" altLang="en-US" sz="2000">
+                <a:solidFill>
+                  <a:schemeClr val="tx1"/>
+                </a:solidFill>
+                <a:latin typeface="宋体" panose="02010600030101010101" pitchFamily="2" charset="-122"/>
+                <a:ea typeface="宋体" panose="02010600030101010101" pitchFamily="2" charset="-122"/>
+              </a:rPr>
+              <a:t>，结果的余数写入</a:t>
             </a:r>
             <a:r>
               <a:rPr lang="en-US" altLang="zh-CN" sz="2000">
